--- a/konfliktkompetens.pptx
+++ b/konfliktkompetens.pptx
@@ -23283,7 +23283,7 @@
                 <a:ea typeface="Roboto Condensed" pitchFamily="34" charset="-122"/>
                 <a:cs typeface="Roboto Condensed" pitchFamily="34" charset="-120"/>
               </a:rPr>
-              <a:t>Arbetsblad: Jordan (2006). Forskning: Almost m.fl. (2016), översikt av 44 artiklar; Skogstad m.fl. (2007).</a:t>
+              <a:t>Arbetsblad: Jordan (2014). Forskning: Almost m.fl. (2016), översikt av 44 artiklar; Skogstad m.fl. (2007).</a:t>
             </a:r>
             <a:endParaRPr lang="sv-SE" sz="1200" dirty="0"/>
           </a:p>
